--- a/DATABASE FORENSICS DAY 3 OF 30.pptx
+++ b/DATABASE FORENSICS DAY 3 OF 30.pptx
@@ -4916,7 +4916,7 @@
                   <a:schemeClr val="bg1"/>
                 </a:solidFill>
               </a:rPr>
-              <a:t> is your log-diving job, and DROP is yor “someone panicked” signal.</a:t>
+              <a:t> is your log-diving job, and DROP is your “someone panicked” signal.</a:t>
             </a:r>
             <a:endParaRPr lang="en-US" altLang="en-GB">
               <a:solidFill>
@@ -5025,7 +5025,7 @@
                   <a:schemeClr val="bg1"/>
                 </a:solidFill>
               </a:rPr>
-              <a:t>TURNICATE</a:t>
+              <a:t>TRUNCATE</a:t>
             </a:r>
             <a:endParaRPr lang="en-US" altLang="en-GB">
               <a:solidFill>
@@ -5267,7 +5267,7 @@
                   <a:schemeClr val="bg1"/>
                 </a:solidFill>
               </a:rPr>
-              <a:t>-- Creat the table </a:t>
+              <a:t>-- Create the table </a:t>
             </a:r>
             <a:endParaRPr lang="en-US" altLang="en-GB">
               <a:solidFill>
